--- a/slide/themes/src/35_watercolor light.pptx
+++ b/slide/themes/src/35_watercolor light.pptx
@@ -2680,9 +2680,6 @@
                     <a:lumOff val="25000"/>
                   </a:schemeClr>
                 </a:solidFill>
-                <a:latin typeface="Open Sans"/>
-                <a:ea typeface="Open Sans"/>
-                <a:cs typeface="Open Sans"/>
               </a:defRPr>
             </a:lvl1pPr>
             <a:lvl2pPr>
@@ -2695,9 +2692,6 @@
                     <a:lumOff val="25000"/>
                   </a:schemeClr>
                 </a:solidFill>
-                <a:latin typeface="Open Sans"/>
-                <a:ea typeface="Open Sans"/>
-                <a:cs typeface="Open Sans"/>
               </a:defRPr>
             </a:lvl2pPr>
             <a:lvl3pPr>
@@ -2710,9 +2704,6 @@
                     <a:lumOff val="25000"/>
                   </a:schemeClr>
                 </a:solidFill>
-                <a:latin typeface="Open Sans"/>
-                <a:ea typeface="Open Sans"/>
-                <a:cs typeface="Open Sans"/>
               </a:defRPr>
             </a:lvl3pPr>
             <a:lvl4pPr>
@@ -2725,9 +2716,6 @@
                     <a:lumOff val="25000"/>
                   </a:schemeClr>
                 </a:solidFill>
-                <a:latin typeface="Open Sans"/>
-                <a:ea typeface="Open Sans"/>
-                <a:cs typeface="Open Sans"/>
               </a:defRPr>
             </a:lvl4pPr>
             <a:lvl5pPr>
@@ -2740,9 +2728,6 @@
                     <a:lumOff val="25000"/>
                   </a:schemeClr>
                 </a:solidFill>
-                <a:latin typeface="Open Sans"/>
-                <a:ea typeface="Open Sans"/>
-                <a:cs typeface="Open Sans"/>
               </a:defRPr>
             </a:lvl5pPr>
             <a:lvl6pPr>
@@ -2778,9 +2763,6 @@
                     <a:lumOff val="25000"/>
                   </a:schemeClr>
                 </a:solidFill>
-                <a:latin typeface="Open Sans"/>
-                <a:ea typeface="Open Sans"/>
-                <a:cs typeface="Open Sans"/>
               </a:rPr>
               <a:t>Click to edit Master text styles</a:t>
             </a:r>
@@ -2798,9 +2780,6 @@
                     <a:lumOff val="25000"/>
                   </a:schemeClr>
                 </a:solidFill>
-                <a:latin typeface="Open Sans"/>
-                <a:ea typeface="Open Sans"/>
-                <a:cs typeface="Open Sans"/>
               </a:rPr>
               <a:t>Second level</a:t>
             </a:r>
@@ -2818,9 +2797,6 @@
                     <a:lumOff val="25000"/>
                   </a:schemeClr>
                 </a:solidFill>
-                <a:latin typeface="Open Sans"/>
-                <a:ea typeface="Open Sans"/>
-                <a:cs typeface="Open Sans"/>
               </a:rPr>
               <a:t>Third level</a:t>
             </a:r>
@@ -3765,9 +3741,6 @@
                     <a:lumOff val="25000"/>
                   </a:schemeClr>
                 </a:solidFill>
-                <a:latin typeface="Open Sans"/>
-                <a:ea typeface="Open Sans"/>
-                <a:cs typeface="Open Sans"/>
               </a:defRPr>
             </a:lvl1pPr>
             <a:lvl2pPr>
@@ -3780,9 +3753,6 @@
                     <a:lumOff val="25000"/>
                   </a:schemeClr>
                 </a:solidFill>
-                <a:latin typeface="Open Sans"/>
-                <a:ea typeface="Open Sans"/>
-                <a:cs typeface="Open Sans"/>
               </a:defRPr>
             </a:lvl2pPr>
             <a:lvl3pPr>
@@ -3795,9 +3765,6 @@
                     <a:lumOff val="25000"/>
                   </a:schemeClr>
                 </a:solidFill>
-                <a:latin typeface="Open Sans"/>
-                <a:ea typeface="Open Sans"/>
-                <a:cs typeface="Open Sans"/>
               </a:defRPr>
             </a:lvl3pPr>
             <a:lvl4pPr>
@@ -3810,9 +3777,6 @@
                     <a:lumOff val="25000"/>
                   </a:schemeClr>
                 </a:solidFill>
-                <a:latin typeface="Open Sans"/>
-                <a:ea typeface="Open Sans"/>
-                <a:cs typeface="Open Sans"/>
               </a:defRPr>
             </a:lvl4pPr>
             <a:lvl5pPr>
@@ -3825,9 +3789,6 @@
                     <a:lumOff val="25000"/>
                   </a:schemeClr>
                 </a:solidFill>
-                <a:latin typeface="Open Sans"/>
-                <a:ea typeface="Open Sans"/>
-                <a:cs typeface="Open Sans"/>
               </a:defRPr>
             </a:lvl5pPr>
             <a:lvl6pPr>
@@ -3859,9 +3820,6 @@
                     <a:lumOff val="25000"/>
                   </a:schemeClr>
                 </a:solidFill>
-                <a:latin typeface="Open Sans"/>
-                <a:ea typeface="Open Sans"/>
-                <a:cs typeface="Open Sans"/>
               </a:rPr>
               <a:t>Click to edit Master text styles</a:t>
             </a:r>
@@ -3879,9 +3837,6 @@
                     <a:lumOff val="25000"/>
                   </a:schemeClr>
                 </a:solidFill>
-                <a:latin typeface="Open Sans"/>
-                <a:ea typeface="Open Sans"/>
-                <a:cs typeface="Open Sans"/>
               </a:rPr>
               <a:t>Second level</a:t>
             </a:r>
@@ -3899,9 +3854,6 @@
                     <a:lumOff val="25000"/>
                   </a:schemeClr>
                 </a:solidFill>
-                <a:latin typeface="Open Sans"/>
-                <a:ea typeface="Open Sans"/>
-                <a:cs typeface="Open Sans"/>
               </a:rPr>
               <a:t>Third level</a:t>
             </a:r>
@@ -3962,9 +3914,6 @@
                     <a:lumOff val="25000"/>
                   </a:schemeClr>
                 </a:solidFill>
-                <a:latin typeface="Open Sans"/>
-                <a:ea typeface="Open Sans"/>
-                <a:cs typeface="Open Sans"/>
               </a:defRPr>
             </a:lvl1pPr>
             <a:lvl2pPr>
@@ -3977,9 +3926,6 @@
                     <a:lumOff val="25000"/>
                   </a:schemeClr>
                 </a:solidFill>
-                <a:latin typeface="Open Sans"/>
-                <a:ea typeface="Open Sans"/>
-                <a:cs typeface="Open Sans"/>
               </a:defRPr>
             </a:lvl2pPr>
             <a:lvl3pPr>
@@ -3992,9 +3938,6 @@
                     <a:lumOff val="25000"/>
                   </a:schemeClr>
                 </a:solidFill>
-                <a:latin typeface="Open Sans"/>
-                <a:ea typeface="Open Sans"/>
-                <a:cs typeface="Open Sans"/>
               </a:defRPr>
             </a:lvl3pPr>
             <a:lvl4pPr>
@@ -4007,9 +3950,6 @@
                     <a:lumOff val="25000"/>
                   </a:schemeClr>
                 </a:solidFill>
-                <a:latin typeface="Open Sans"/>
-                <a:ea typeface="Open Sans"/>
-                <a:cs typeface="Open Sans"/>
               </a:defRPr>
             </a:lvl4pPr>
             <a:lvl5pPr>
@@ -4022,9 +3962,6 @@
                     <a:lumOff val="25000"/>
                   </a:schemeClr>
                 </a:solidFill>
-                <a:latin typeface="Open Sans"/>
-                <a:ea typeface="Open Sans"/>
-                <a:cs typeface="Open Sans"/>
               </a:defRPr>
             </a:lvl5pPr>
             <a:lvl6pPr>
@@ -4056,9 +3993,6 @@
                     <a:lumOff val="25000"/>
                   </a:schemeClr>
                 </a:solidFill>
-                <a:latin typeface="Open Sans"/>
-                <a:ea typeface="Open Sans"/>
-                <a:cs typeface="Open Sans"/>
               </a:rPr>
               <a:t>Click to edit Master text styles</a:t>
             </a:r>
@@ -4076,9 +4010,6 @@
                     <a:lumOff val="25000"/>
                   </a:schemeClr>
                 </a:solidFill>
-                <a:latin typeface="Open Sans"/>
-                <a:ea typeface="Open Sans"/>
-                <a:cs typeface="Open Sans"/>
               </a:rPr>
               <a:t>Second level</a:t>
             </a:r>
@@ -4096,9 +4027,6 @@
                     <a:lumOff val="25000"/>
                   </a:schemeClr>
                 </a:solidFill>
-                <a:latin typeface="Open Sans"/>
-                <a:ea typeface="Open Sans"/>
-                <a:cs typeface="Open Sans"/>
               </a:rPr>
               <a:t>Third level</a:t>
             </a:r>
@@ -4705,9 +4633,6 @@
                 <a:solidFill>
                   <a:schemeClr val="accent6"/>
                 </a:solidFill>
-                <a:latin typeface="Times New Roman"/>
-                <a:ea typeface="Times New Roman"/>
-                <a:cs typeface="Times New Roman"/>
               </a:defRPr>
             </a:lvl1pPr>
             <a:lvl2pPr marL="457200" indent="0">
@@ -4793,9 +4718,6 @@
                 <a:solidFill>
                   <a:schemeClr val="accent6"/>
                 </a:solidFill>
-                <a:latin typeface="Times New Roman"/>
-                <a:ea typeface="Times New Roman"/>
-                <a:cs typeface="Times New Roman"/>
               </a:defRPr>
             </a:lvl1pPr>
             <a:lvl2pPr marL="457200" indent="0">
@@ -4882,9 +4804,6 @@
                     <a:lumOff val="25000"/>
                   </a:schemeClr>
                 </a:solidFill>
-                <a:latin typeface="Open Sans"/>
-                <a:ea typeface="Open Sans"/>
-                <a:cs typeface="Open Sans"/>
               </a:defRPr>
             </a:lvl1pPr>
             <a:lvl2pPr marL="228600">
@@ -4897,9 +4816,6 @@
                     <a:lumOff val="25000"/>
                   </a:schemeClr>
                 </a:solidFill>
-                <a:latin typeface="Open Sans"/>
-                <a:ea typeface="Open Sans"/>
-                <a:cs typeface="Open Sans"/>
               </a:defRPr>
             </a:lvl2pPr>
             <a:lvl3pPr marL="228600">
@@ -4912,9 +4828,6 @@
                     <a:lumOff val="25000"/>
                   </a:schemeClr>
                 </a:solidFill>
-                <a:latin typeface="Open Sans"/>
-                <a:ea typeface="Open Sans"/>
-                <a:cs typeface="Open Sans"/>
               </a:defRPr>
             </a:lvl3pPr>
             <a:lvl4pPr marL="228600">
@@ -4927,9 +4840,6 @@
                     <a:lumOff val="25000"/>
                   </a:schemeClr>
                 </a:solidFill>
-                <a:latin typeface="Open Sans"/>
-                <a:ea typeface="Open Sans"/>
-                <a:cs typeface="Open Sans"/>
               </a:defRPr>
             </a:lvl4pPr>
             <a:lvl5pPr marL="228600">
@@ -4942,9 +4852,6 @@
                     <a:lumOff val="25000"/>
                   </a:schemeClr>
                 </a:solidFill>
-                <a:latin typeface="Open Sans"/>
-                <a:ea typeface="Open Sans"/>
-                <a:cs typeface="Open Sans"/>
               </a:defRPr>
             </a:lvl5pPr>
             <a:lvl6pPr marL="228600">
@@ -4976,9 +4883,6 @@
                     <a:lumOff val="25000"/>
                   </a:schemeClr>
                 </a:solidFill>
-                <a:latin typeface="Open Sans"/>
-                <a:ea typeface="Open Sans"/>
-                <a:cs typeface="Open Sans"/>
               </a:rPr>
               <a:t>Click to edit Master text styles</a:t>
             </a:r>
@@ -4996,9 +4900,6 @@
                     <a:lumOff val="25000"/>
                   </a:schemeClr>
                 </a:solidFill>
-                <a:latin typeface="Open Sans"/>
-                <a:ea typeface="Open Sans"/>
-                <a:cs typeface="Open Sans"/>
               </a:rPr>
               <a:t>Second level</a:t>
             </a:r>
@@ -5016,9 +4917,6 @@
                     <a:lumOff val="25000"/>
                   </a:schemeClr>
                 </a:solidFill>
-                <a:latin typeface="Open Sans"/>
-                <a:ea typeface="Open Sans"/>
-                <a:cs typeface="Open Sans"/>
               </a:rPr>
               <a:t>Third level</a:t>
             </a:r>
@@ -5077,9 +4975,6 @@
                     <a:lumOff val="25000"/>
                   </a:schemeClr>
                 </a:solidFill>
-                <a:latin typeface="Open Sans"/>
-                <a:ea typeface="Open Sans"/>
-                <a:cs typeface="Open Sans"/>
               </a:defRPr>
             </a:lvl1pPr>
             <a:lvl2pPr marL="228600">
@@ -5092,9 +4987,6 @@
                     <a:lumOff val="25000"/>
                   </a:schemeClr>
                 </a:solidFill>
-                <a:latin typeface="Open Sans"/>
-                <a:ea typeface="Open Sans"/>
-                <a:cs typeface="Open Sans"/>
               </a:defRPr>
             </a:lvl2pPr>
             <a:lvl3pPr marL="228600">
@@ -5107,9 +4999,6 @@
                     <a:lumOff val="25000"/>
                   </a:schemeClr>
                 </a:solidFill>
-                <a:latin typeface="Open Sans"/>
-                <a:ea typeface="Open Sans"/>
-                <a:cs typeface="Open Sans"/>
               </a:defRPr>
             </a:lvl3pPr>
             <a:lvl4pPr marL="228600">
@@ -5122,9 +5011,6 @@
                     <a:lumOff val="25000"/>
                   </a:schemeClr>
                 </a:solidFill>
-                <a:latin typeface="Open Sans"/>
-                <a:ea typeface="Open Sans"/>
-                <a:cs typeface="Open Sans"/>
               </a:defRPr>
             </a:lvl4pPr>
             <a:lvl5pPr marL="228600">
@@ -5137,9 +5023,6 @@
                     <a:lumOff val="25000"/>
                   </a:schemeClr>
                 </a:solidFill>
-                <a:latin typeface="Open Sans"/>
-                <a:ea typeface="Open Sans"/>
-                <a:cs typeface="Open Sans"/>
               </a:defRPr>
             </a:lvl5pPr>
             <a:lvl6pPr marL="228600">
@@ -5171,9 +5054,6 @@
                     <a:lumOff val="25000"/>
                   </a:schemeClr>
                 </a:solidFill>
-                <a:latin typeface="Open Sans"/>
-                <a:ea typeface="Open Sans"/>
-                <a:cs typeface="Open Sans"/>
               </a:rPr>
               <a:t>Click to edit Master text styles</a:t>
             </a:r>
@@ -5191,9 +5071,6 @@
                     <a:lumOff val="25000"/>
                   </a:schemeClr>
                 </a:solidFill>
-                <a:latin typeface="Open Sans"/>
-                <a:ea typeface="Open Sans"/>
-                <a:cs typeface="Open Sans"/>
               </a:rPr>
               <a:t>Second level</a:t>
             </a:r>
@@ -5211,9 +5088,6 @@
                     <a:lumOff val="25000"/>
                   </a:schemeClr>
                 </a:solidFill>
-                <a:latin typeface="Open Sans"/>
-                <a:ea typeface="Open Sans"/>
-                <a:cs typeface="Open Sans"/>
               </a:rPr>
               <a:t>Third level</a:t>
             </a:r>
@@ -7288,9 +7162,6 @@
                 <a:solidFill>
                   <a:schemeClr val="bg1"/>
                 </a:solidFill>
-                <a:latin typeface="Open Sans"/>
-                <a:ea typeface="Open Sans"/>
-                <a:cs typeface="Open Sans"/>
               </a:defRPr>
             </a:lvl1pPr>
             <a:lvl2pPr>
@@ -7300,9 +7171,6 @@
                 <a:solidFill>
                   <a:schemeClr val="bg1"/>
                 </a:solidFill>
-                <a:latin typeface="Open Sans"/>
-                <a:ea typeface="Open Sans"/>
-                <a:cs typeface="Open Sans"/>
               </a:defRPr>
             </a:lvl2pPr>
             <a:lvl3pPr>
@@ -7312,9 +7180,6 @@
                 <a:solidFill>
                   <a:schemeClr val="bg1"/>
                 </a:solidFill>
-                <a:latin typeface="Open Sans"/>
-                <a:ea typeface="Open Sans"/>
-                <a:cs typeface="Open Sans"/>
               </a:defRPr>
             </a:lvl3pPr>
             <a:lvl4pPr>
@@ -7324,9 +7189,6 @@
                 <a:solidFill>
                   <a:schemeClr val="bg1"/>
                 </a:solidFill>
-                <a:latin typeface="Open Sans"/>
-                <a:ea typeface="Open Sans"/>
-                <a:cs typeface="Open Sans"/>
               </a:defRPr>
             </a:lvl4pPr>
             <a:lvl5pPr>
@@ -7336,9 +7198,6 @@
                 <a:solidFill>
                   <a:schemeClr val="bg1"/>
                 </a:solidFill>
-                <a:latin typeface="Open Sans"/>
-                <a:ea typeface="Open Sans"/>
-                <a:cs typeface="Open Sans"/>
               </a:defRPr>
             </a:lvl5pPr>
             <a:lvl6pPr>
@@ -7386,9 +7245,6 @@
                     <a:lumOff val="25000"/>
                   </a:schemeClr>
                 </a:solidFill>
-                <a:latin typeface="Open Sans"/>
-                <a:ea typeface="Open Sans"/>
-                <a:cs typeface="Open Sans"/>
               </a:rPr>
               <a:t>Click to edit Master text styles</a:t>
             </a:r>
@@ -7406,9 +7262,6 @@
                     <a:lumOff val="25000"/>
                   </a:schemeClr>
                 </a:solidFill>
-                <a:latin typeface="Open Sans"/>
-                <a:ea typeface="Open Sans"/>
-                <a:cs typeface="Open Sans"/>
               </a:rPr>
               <a:t>Second level</a:t>
             </a:r>
@@ -7426,9 +7279,6 @@
                     <a:lumOff val="25000"/>
                   </a:schemeClr>
                 </a:solidFill>
-                <a:latin typeface="Open Sans"/>
-                <a:ea typeface="Open Sans"/>
-                <a:cs typeface="Open Sans"/>
               </a:rPr>
               <a:t>Third level</a:t>
             </a:r>
@@ -7920,9 +7770,6 @@
                     <a:lumOff val="25000"/>
                   </a:schemeClr>
                 </a:solidFill>
-                <a:latin typeface="Open Sans"/>
-                <a:ea typeface="Open Sans"/>
-                <a:cs typeface="Open Sans"/>
               </a:defRPr>
             </a:lvl1pPr>
             <a:lvl2pPr>
@@ -7935,9 +7782,6 @@
                     <a:lumOff val="25000"/>
                   </a:schemeClr>
                 </a:solidFill>
-                <a:latin typeface="Open Sans"/>
-                <a:ea typeface="Open Sans"/>
-                <a:cs typeface="Open Sans"/>
               </a:defRPr>
             </a:lvl2pPr>
             <a:lvl3pPr>
@@ -7950,9 +7794,6 @@
                     <a:lumOff val="25000"/>
                   </a:schemeClr>
                 </a:solidFill>
-                <a:latin typeface="Open Sans"/>
-                <a:ea typeface="Open Sans"/>
-                <a:cs typeface="Open Sans"/>
               </a:defRPr>
             </a:lvl3pPr>
             <a:lvl4pPr>
@@ -7965,9 +7806,6 @@
                     <a:lumOff val="25000"/>
                   </a:schemeClr>
                 </a:solidFill>
-                <a:latin typeface="Open Sans"/>
-                <a:ea typeface="Open Sans"/>
-                <a:cs typeface="Open Sans"/>
               </a:defRPr>
             </a:lvl4pPr>
             <a:lvl5pPr>
@@ -7980,9 +7818,6 @@
                     <a:lumOff val="25000"/>
                   </a:schemeClr>
                 </a:solidFill>
-                <a:latin typeface="Open Sans"/>
-                <a:ea typeface="Open Sans"/>
-                <a:cs typeface="Open Sans"/>
               </a:defRPr>
             </a:lvl5pPr>
             <a:lvl6pPr>
@@ -8014,9 +7849,6 @@
                     <a:lumOff val="25000"/>
                   </a:schemeClr>
                 </a:solidFill>
-                <a:latin typeface="Open Sans"/>
-                <a:ea typeface="Open Sans"/>
-                <a:cs typeface="Open Sans"/>
               </a:rPr>
               <a:t>Click to edit Master text styles</a:t>
             </a:r>
@@ -8034,9 +7866,6 @@
                     <a:lumOff val="25000"/>
                   </a:schemeClr>
                 </a:solidFill>
-                <a:latin typeface="Open Sans"/>
-                <a:ea typeface="Open Sans"/>
-                <a:cs typeface="Open Sans"/>
               </a:rPr>
               <a:t>Second level</a:t>
             </a:r>
@@ -8054,9 +7883,6 @@
                     <a:lumOff val="25000"/>
                   </a:schemeClr>
                 </a:solidFill>
-                <a:latin typeface="Open Sans"/>
-                <a:ea typeface="Open Sans"/>
-                <a:cs typeface="Open Sans"/>
               </a:rPr>
               <a:t>Third level</a:t>
             </a:r>
@@ -8830,9 +8656,6 @@
                     <a:lumOff val="25000"/>
                   </a:schemeClr>
                 </a:solidFill>
-                <a:latin typeface="Open Sans"/>
-                <a:ea typeface="Open Sans"/>
-                <a:cs typeface="Open Sans"/>
               </a:defRPr>
             </a:lvl1pPr>
             <a:lvl2pPr>
@@ -8845,9 +8668,6 @@
                     <a:lumOff val="25000"/>
                   </a:schemeClr>
                 </a:solidFill>
-                <a:latin typeface="Open Sans"/>
-                <a:ea typeface="Open Sans"/>
-                <a:cs typeface="Open Sans"/>
               </a:defRPr>
             </a:lvl2pPr>
             <a:lvl3pPr>
@@ -8860,9 +8680,6 @@
                     <a:lumOff val="25000"/>
                   </a:schemeClr>
                 </a:solidFill>
-                <a:latin typeface="Open Sans"/>
-                <a:ea typeface="Open Sans"/>
-                <a:cs typeface="Open Sans"/>
               </a:defRPr>
             </a:lvl3pPr>
             <a:lvl4pPr>
@@ -8875,9 +8692,6 @@
                     <a:lumOff val="25000"/>
                   </a:schemeClr>
                 </a:solidFill>
-                <a:latin typeface="Open Sans"/>
-                <a:ea typeface="Open Sans"/>
-                <a:cs typeface="Open Sans"/>
               </a:defRPr>
             </a:lvl4pPr>
             <a:lvl5pPr>
@@ -8890,9 +8704,6 @@
                     <a:lumOff val="25000"/>
                   </a:schemeClr>
                 </a:solidFill>
-                <a:latin typeface="Open Sans"/>
-                <a:ea typeface="Open Sans"/>
-                <a:cs typeface="Open Sans"/>
               </a:defRPr>
             </a:lvl5pPr>
             <a:lvl6pPr>
@@ -8924,9 +8735,6 @@
                     <a:lumOff val="25000"/>
                   </a:schemeClr>
                 </a:solidFill>
-                <a:latin typeface="Open Sans"/>
-                <a:ea typeface="Open Sans"/>
-                <a:cs typeface="Open Sans"/>
               </a:rPr>
               <a:t>Click to edit Master text styles</a:t>
             </a:r>
@@ -8944,9 +8752,6 @@
                     <a:lumOff val="25000"/>
                   </a:schemeClr>
                 </a:solidFill>
-                <a:latin typeface="Open Sans"/>
-                <a:ea typeface="Open Sans"/>
-                <a:cs typeface="Open Sans"/>
               </a:rPr>
               <a:t>Second level</a:t>
             </a:r>
@@ -8964,9 +8769,6 @@
                     <a:lumOff val="25000"/>
                   </a:schemeClr>
                 </a:solidFill>
-                <a:latin typeface="Open Sans"/>
-                <a:ea typeface="Open Sans"/>
-                <a:cs typeface="Open Sans"/>
               </a:rPr>
               <a:t>Third level</a:t>
             </a:r>
@@ -9463,9 +9265,6 @@
                 <a:solidFill>
                   <a:schemeClr val="accent6"/>
                 </a:solidFill>
-                <a:latin typeface="Times New Roman"/>
-                <a:ea typeface="Times New Roman"/>
-                <a:cs typeface="Times New Roman"/>
               </a:defRPr>
             </a:lvl1pPr>
           </a:lstStyle>
@@ -9518,9 +9317,6 @@
                     <a:lumOff val="25000"/>
                   </a:schemeClr>
                 </a:solidFill>
-                <a:latin typeface="Verdana"/>
-                <a:ea typeface="Verdana"/>
-                <a:cs typeface="Verdana"/>
               </a:defRPr>
             </a:lvl1pPr>
             <a:lvl2pPr>
@@ -9536,9 +9332,6 @@
                     <a:lumOff val="25000"/>
                   </a:schemeClr>
                 </a:solidFill>
-                <a:latin typeface="Verdana"/>
-                <a:ea typeface="Verdana"/>
-                <a:cs typeface="Verdana"/>
               </a:defRPr>
             </a:lvl2pPr>
             <a:lvl3pPr>
@@ -9554,9 +9347,6 @@
                     <a:lumOff val="25000"/>
                   </a:schemeClr>
                 </a:solidFill>
-                <a:latin typeface="Verdana"/>
-                <a:ea typeface="Verdana"/>
-                <a:cs typeface="Verdana"/>
               </a:defRPr>
             </a:lvl3pPr>
             <a:lvl4pPr>
@@ -9569,9 +9359,6 @@
                     <a:lumOff val="25000"/>
                   </a:schemeClr>
                 </a:solidFill>
-                <a:latin typeface="Verdana"/>
-                <a:ea typeface="Verdana"/>
-                <a:cs typeface="Verdana"/>
               </a:defRPr>
             </a:lvl4pPr>
             <a:lvl5pPr>
@@ -9584,42 +9371,23 @@
                     <a:lumOff val="25000"/>
                   </a:schemeClr>
                 </a:solidFill>
-                <a:latin typeface="Verdana"/>
-                <a:ea typeface="Verdana"/>
-                <a:cs typeface="Verdana"/>
               </a:defRPr>
             </a:lvl5pPr>
             <a:lvl6pPr>
               <a:buNone/>
-              <a:defRPr>
-                <a:latin typeface="Verdana"/>
-                <a:ea typeface="Verdana"/>
-                <a:cs typeface="Verdana"/>
-              </a:defRPr>
+              <a:defRPr/>
             </a:lvl6pPr>
             <a:lvl7pPr>
               <a:buNone/>
-              <a:defRPr>
-                <a:latin typeface="Verdana"/>
-                <a:ea typeface="Verdana"/>
-                <a:cs typeface="Verdana"/>
-              </a:defRPr>
+              <a:defRPr/>
             </a:lvl7pPr>
             <a:lvl8pPr>
               <a:buNone/>
-              <a:defRPr>
-                <a:latin typeface="Verdana"/>
-                <a:ea typeface="Verdana"/>
-                <a:cs typeface="Verdana"/>
-              </a:defRPr>
+              <a:defRPr/>
             </a:lvl8pPr>
             <a:lvl9pPr>
               <a:buNone/>
-              <a:defRPr>
-                <a:latin typeface="Verdana"/>
-                <a:ea typeface="Verdana"/>
-                <a:cs typeface="Verdana"/>
-              </a:defRPr>
+              <a:defRPr/>
             </a:lvl9pPr>
           </a:lstStyle>
           <a:p>
@@ -9634,9 +9402,6 @@
                     <a:lumOff val="25000"/>
                   </a:schemeClr>
                 </a:solidFill>
-                <a:latin typeface="Open Sans"/>
-                <a:ea typeface="Open Sans"/>
-                <a:cs typeface="Open Sans"/>
               </a:rPr>
               <a:t>Click to edit Master text styles</a:t>
             </a:r>
@@ -9654,9 +9419,6 @@
                     <a:lumOff val="25000"/>
                   </a:schemeClr>
                 </a:solidFill>
-                <a:latin typeface="Open Sans"/>
-                <a:ea typeface="Open Sans"/>
-                <a:cs typeface="Open Sans"/>
               </a:rPr>
               <a:t>Second level</a:t>
             </a:r>
@@ -9674,9 +9436,6 @@
                     <a:lumOff val="25000"/>
                   </a:schemeClr>
                 </a:solidFill>
-                <a:latin typeface="Open Sans"/>
-                <a:ea typeface="Open Sans"/>
-                <a:cs typeface="Open Sans"/>
               </a:rPr>
               <a:t>Third level</a:t>
             </a:r>
@@ -10299,14 +10058,14 @@
     </a:clrScheme>
     <a:fontScheme name="Office Theme">
       <a:majorFont>
-        <a:latin typeface="Arial"/>
+        <a:latin typeface="Times New Roman"/>
         <a:ea typeface="SimSun"/>
-        <a:cs typeface="Arial"/>
+        <a:cs typeface="Times New Roman"/>
       </a:majorFont>
       <a:minorFont>
-        <a:latin typeface="Arial"/>
-        <a:ea typeface="SimSun"/>
-        <a:cs typeface="Arial"/>
+        <a:latin typeface="Open Sans"/>
+        <a:ea typeface="Microsoft YaHei"/>
+        <a:cs typeface="Open Sans"/>
       </a:minorFont>
     </a:fontScheme>
     <a:fmtScheme name="Office Theme">
@@ -10536,14 +10295,14 @@
     </a:clrScheme>
     <a:fontScheme name="Arial">
       <a:majorFont>
-        <a:latin typeface="Arial"/>
-        <a:ea typeface="Arial"/>
-        <a:cs typeface="Arial"/>
+        <a:latin typeface="Times New Roman"/>
+        <a:ea typeface="SimSun"/>
+        <a:cs typeface="Times New Roman"/>
       </a:majorFont>
       <a:minorFont>
-        <a:latin typeface="Arial"/>
-        <a:ea typeface="Arial"/>
-        <a:cs typeface="Arial"/>
+        <a:latin typeface="Open Sans"/>
+        <a:ea typeface="Microsoft YaHei"/>
+        <a:cs typeface="Open Sans"/>
       </a:minorFont>
     </a:fontScheme>
     <a:fmtScheme name="Office">

--- a/slide/themes/src/35_watercolor light.pptx
+++ b/slide/themes/src/35_watercolor light.pptx
@@ -2274,6 +2274,207 @@
 </p:sldLayout>
 </file>
 
+<file path=ppt/slideLayouts/slideLayout11.xml><?xml version="1.0" encoding="utf-8"?>
+<p:sldLayout xmlns:a="http://schemas.openxmlformats.org/drawingml/2006/main" xmlns:r="http://schemas.openxmlformats.org/officeDocument/2006/relationships" xmlns:p="http://schemas.openxmlformats.org/presentationml/2006/main" xmlns:m="http://schemas.openxmlformats.org/officeDocument/2006/math" xmlns:w="http://schemas.openxmlformats.org/wordprocessingml/2006/main" matchingName="" preserve="1" showMasterPhAnim="0" showMasterSp="1" type="vertTitleAndTx" userDrawn="1">
+  <p:cSld name="Vertical Title and Text">
+    <p:spTree>
+      <p:nvGrpSpPr>
+        <p:cNvPr id="1" name=""/>
+        <p:cNvGrpSpPr/>
+        <p:nvPr/>
+      </p:nvGrpSpPr>
+      <p:grpSpPr bwMode="auto">
+        <a:xfrm>
+          <a:off x="0" y="0"/>
+          <a:ext cx="0" cy="0"/>
+          <a:chOff x="0" y="0"/>
+          <a:chExt cx="0" cy="0"/>
+        </a:xfrm>
+      </p:grpSpPr>
+      <p:sp>
+        <p:nvSpPr>
+          <p:cNvPr id="1972331297" name="Vertical Title 1"/>
+          <p:cNvSpPr>
+            <a:spLocks noGrp="1"/>
+          </p:cNvSpPr>
+          <p:nvPr>
+            <p:ph type="title" orient="vert"/>
+          </p:nvPr>
+        </p:nvSpPr>
+        <p:spPr bwMode="auto">
+          <a:xfrm>
+            <a:off x="8724900" y="365125"/>
+            <a:ext cx="2628900" cy="5811838"/>
+          </a:xfrm>
+        </p:spPr>
+        <p:txBody>
+          <a:bodyPr vert="eaVert"/>
+          <a:lstStyle/>
+          <a:p>
+            <a:pPr>
+              <a:defRPr/>
+            </a:pPr>
+            <a:r>
+              <a:rPr lang="en-US"/>
+              <a:t>Click to edit Master title style</a:t>
+            </a:r>
+            <a:endParaRPr lang="en-US"/>
+          </a:p>
+        </p:txBody>
+      </p:sp>
+      <p:sp>
+        <p:nvSpPr>
+          <p:cNvPr id="1183862481" name="Vertical Text Placeholder 2"/>
+          <p:cNvSpPr>
+            <a:spLocks noGrp="1"/>
+          </p:cNvSpPr>
+          <p:nvPr>
+            <p:ph type="body" orient="vert" idx="1"/>
+          </p:nvPr>
+        </p:nvSpPr>
+        <p:spPr bwMode="auto">
+          <a:xfrm>
+            <a:off x="838200" y="365125"/>
+            <a:ext cx="7734300" cy="5811838"/>
+          </a:xfrm>
+        </p:spPr>
+        <p:txBody>
+          <a:bodyPr vert="eaVert"/>
+          <a:lstStyle/>
+          <a:p>
+            <a:pPr lvl="0">
+              <a:defRPr/>
+            </a:pPr>
+            <a:r>
+              <a:rPr lang="en-US"/>
+              <a:t>Click to edit Master text styles</a:t>
+            </a:r>
+            <a:endParaRPr/>
+          </a:p>
+          <a:p>
+            <a:pPr lvl="1">
+              <a:defRPr/>
+            </a:pPr>
+            <a:r>
+              <a:rPr lang="en-US"/>
+              <a:t>Second level</a:t>
+            </a:r>
+            <a:endParaRPr/>
+          </a:p>
+          <a:p>
+            <a:pPr lvl="2">
+              <a:defRPr/>
+            </a:pPr>
+            <a:r>
+              <a:rPr lang="en-US"/>
+              <a:t>Third level</a:t>
+            </a:r>
+            <a:endParaRPr/>
+          </a:p>
+          <a:p>
+            <a:pPr lvl="3">
+              <a:defRPr/>
+            </a:pPr>
+            <a:r>
+              <a:rPr lang="en-US"/>
+              <a:t>Fourth level</a:t>
+            </a:r>
+            <a:endParaRPr/>
+          </a:p>
+          <a:p>
+            <a:pPr lvl="4">
+              <a:defRPr/>
+            </a:pPr>
+            <a:r>
+              <a:rPr lang="en-US"/>
+              <a:t>Fifth level</a:t>
+            </a:r>
+            <a:endParaRPr lang="en-US"/>
+          </a:p>
+        </p:txBody>
+      </p:sp>
+      <p:sp>
+        <p:nvSpPr>
+          <p:cNvPr id="1013753926" name="Date Placeholder 3"/>
+          <p:cNvSpPr>
+            <a:spLocks noGrp="1"/>
+          </p:cNvSpPr>
+          <p:nvPr>
+            <p:ph type="dt" sz="half" idx="10"/>
+          </p:nvPr>
+        </p:nvSpPr>
+        <p:spPr bwMode="auto"/>
+        <p:txBody>
+          <a:bodyPr/>
+          <a:lstStyle/>
+          <a:p>
+            <a:pPr>
+              <a:defRPr/>
+            </a:pPr>
+            <a:fld id="{BCC18F51-09EC-435C-A3BA-64A766E099C0}" type="datetimeFigureOut">
+              <a:rPr lang="en-US"/>
+              <a:t>30.10.2013</a:t>
+            </a:fld>
+            <a:endParaRPr lang="en-US"/>
+          </a:p>
+        </p:txBody>
+      </p:sp>
+      <p:sp>
+        <p:nvSpPr>
+          <p:cNvPr id="1540867788" name="Footer Placeholder 4"/>
+          <p:cNvSpPr>
+            <a:spLocks noGrp="1"/>
+          </p:cNvSpPr>
+          <p:nvPr>
+            <p:ph type="ftr" sz="quarter" idx="11"/>
+          </p:nvPr>
+        </p:nvSpPr>
+        <p:spPr bwMode="auto"/>
+        <p:txBody>
+          <a:bodyPr/>
+          <a:lstStyle/>
+          <a:p>
+            <a:pPr>
+              <a:defRPr/>
+            </a:pPr>
+            <a:endParaRPr lang="en-US"/>
+          </a:p>
+        </p:txBody>
+      </p:sp>
+      <p:sp>
+        <p:nvSpPr>
+          <p:cNvPr id="1214098816" name="Slide Number Placeholder 5"/>
+          <p:cNvSpPr>
+            <a:spLocks noGrp="1"/>
+          </p:cNvSpPr>
+          <p:nvPr>
+            <p:ph type="sldNum" sz="quarter" idx="12"/>
+          </p:nvPr>
+        </p:nvSpPr>
+        <p:spPr bwMode="auto"/>
+        <p:txBody>
+          <a:bodyPr/>
+          <a:lstStyle/>
+          <a:p>
+            <a:pPr>
+              <a:defRPr/>
+            </a:pPr>
+            <a:fld id="{08395586-F03A-48D1-94DF-16B239DF4FB5}" type="slidenum">
+              <a:rPr lang="en-US"/>
+              <a:t>‹#›</a:t>
+            </a:fld>
+            <a:endParaRPr lang="en-US"/>
+          </a:p>
+        </p:txBody>
+      </p:sp>
+    </p:spTree>
+  </p:cSld>
+  <p:clrMapOvr>
+    <a:masterClrMapping/>
+  </p:clrMapOvr>
+</p:sldLayout>
+</file>
+
 <file path=ppt/slideLayouts/slideLayout2.xml><?xml version="1.0" encoding="utf-8"?>
 <p:sldLayout xmlns:a="http://schemas.openxmlformats.org/drawingml/2006/main" xmlns:r="http://schemas.openxmlformats.org/officeDocument/2006/relationships" xmlns:p="http://schemas.openxmlformats.org/presentationml/2006/main" xmlns:m="http://schemas.openxmlformats.org/officeDocument/2006/math" xmlns:w="http://schemas.openxmlformats.org/wordprocessingml/2006/main" matchingName="" preserve="1" showMasterPhAnim="0" showMasterSp="1" type="obj" userDrawn="1">
   <p:cSld name="Title and Content">
@@ -8415,19 +8616,8 @@
 </file>
 
 <file path=ppt/slideLayouts/slideLayout9.xml><?xml version="1.0" encoding="utf-8"?>
-<p:sldLayout xmlns:a="http://schemas.openxmlformats.org/drawingml/2006/main" xmlns:r="http://schemas.openxmlformats.org/officeDocument/2006/relationships" xmlns:p="http://schemas.openxmlformats.org/presentationml/2006/main" xmlns:m="http://schemas.openxmlformats.org/officeDocument/2006/math" xmlns:w="http://schemas.openxmlformats.org/wordprocessingml/2006/main" matchingName="" preserve="1" showMasterPhAnim="0" showMasterSp="1" type="picTx" userDrawn="1">
-  <p:cSld name="Picture with Caption">
-    <p:bg>
-      <p:bgPr shadeToTitle="0">
-        <a:solidFill>
-          <a:schemeClr val="accent6">
-            <a:lumMod val="20000"/>
-            <a:lumOff val="80000"/>
-            <a:alpha val="49999"/>
-          </a:schemeClr>
-        </a:solidFill>
-      </p:bgPr>
-    </p:bg>
+<p:sldLayout xmlns:a="http://schemas.openxmlformats.org/drawingml/2006/main" xmlns:r="http://schemas.openxmlformats.org/officeDocument/2006/relationships" xmlns:p="http://schemas.openxmlformats.org/presentationml/2006/main" xmlns:m="http://schemas.openxmlformats.org/officeDocument/2006/math" xmlns:w="http://schemas.openxmlformats.org/wordprocessingml/2006/main" matchingName="" preserve="1" showMasterPhAnim="0" showMasterSp="1" type="blank" userDrawn="1">
+  <p:cSld name="Blank">
     <p:spTree>
       <p:nvGrpSpPr>
         <p:cNvPr id="1" name=""/>
@@ -8444,75 +8634,7 @@
       </p:grpSpPr>
       <p:sp>
         <p:nvSpPr>
-          <p:cNvPr id="779198199" name="Picture Placeholder 2"/>
-          <p:cNvSpPr>
-            <a:spLocks noChangeAspect="1" noGrp="1"/>
-          </p:cNvSpPr>
-          <p:nvPr>
-            <p:ph type="pic" idx="1"/>
-          </p:nvPr>
-        </p:nvSpPr>
-        <p:spPr bwMode="auto">
-          <a:xfrm flipH="0" flipV="0">
-            <a:off x="5820750" y="2057400"/>
-            <a:ext cx="5528999" cy="3811587"/>
-          </a:xfrm>
-        </p:spPr>
-        <p:txBody>
-          <a:bodyPr anchor="t"/>
-          <a:lstStyle>
-            <a:lvl1pPr marL="0" indent="0">
-              <a:buNone/>
-              <a:defRPr sz="2400"/>
-            </a:lvl1pPr>
-            <a:lvl2pPr marL="457200" indent="0">
-              <a:buNone/>
-              <a:defRPr sz="2800"/>
-            </a:lvl2pPr>
-            <a:lvl3pPr marL="914400" indent="0">
-              <a:buNone/>
-              <a:defRPr sz="2400"/>
-            </a:lvl3pPr>
-            <a:lvl4pPr marL="1371600" indent="0">
-              <a:buNone/>
-              <a:defRPr sz="2000"/>
-            </a:lvl4pPr>
-            <a:lvl5pPr marL="1828800" indent="0">
-              <a:buNone/>
-              <a:defRPr sz="2000"/>
-            </a:lvl5pPr>
-            <a:lvl6pPr marL="2286000" indent="0">
-              <a:buNone/>
-              <a:defRPr sz="2000"/>
-            </a:lvl6pPr>
-            <a:lvl7pPr marL="2743200" indent="0">
-              <a:buNone/>
-              <a:defRPr sz="2000"/>
-            </a:lvl7pPr>
-            <a:lvl8pPr marL="3200400" indent="0">
-              <a:buNone/>
-              <a:defRPr sz="2000"/>
-            </a:lvl8pPr>
-            <a:lvl9pPr marL="3657600" indent="0">
-              <a:buNone/>
-              <a:defRPr sz="2000"/>
-            </a:lvl9pPr>
-          </a:lstStyle>
-          <a:p>
-            <a:pPr>
-              <a:defRPr/>
-            </a:pPr>
-            <a:r>
-              <a:rPr lang="en-US"/>
-              <a:t>Click icon to add picture</a:t>
-            </a:r>
-            <a:endParaRPr lang="en-US"/>
-          </a:p>
-        </p:txBody>
-      </p:sp>
-      <p:sp>
-        <p:nvSpPr>
-          <p:cNvPr id="1263923169" name="Date Placeholder 4"/>
+          <p:cNvPr id="391689534" name="Date Placeholder 1"/>
           <p:cNvSpPr>
             <a:spLocks noGrp="1"/>
           </p:cNvSpPr>
@@ -8528,9 +8650,9 @@
             <a:pPr>
               <a:defRPr/>
             </a:pPr>
-            <a:fld id="{55AB4090-1D1B-CA06-9941-438B2CAEF45E}" type="datetimeFigureOut">
+            <a:fld id="{BCC18F51-09EC-435C-A3BA-64A766E099C0}" type="datetimeFigureOut">
               <a:rPr lang="en-US"/>
-              <a:t/>
+              <a:t>30.10.2013</a:t>
             </a:fld>
             <a:endParaRPr lang="en-US"/>
           </a:p>
@@ -8538,7 +8660,7 @@
       </p:sp>
       <p:sp>
         <p:nvSpPr>
-          <p:cNvPr id="549788456" name="Footer Placeholder 5"/>
+          <p:cNvPr id="2077239585" name="Footer Placeholder 2"/>
           <p:cNvSpPr>
             <a:spLocks noGrp="1"/>
           </p:cNvSpPr>
@@ -8560,7 +8682,7 @@
       </p:sp>
       <p:sp>
         <p:nvSpPr>
-          <p:cNvPr id="2105771703" name="Slide Number Placeholder 6"/>
+          <p:cNvPr id="1778790831" name="Slide Number Placeholder 3"/>
           <p:cNvSpPr>
             <a:spLocks noGrp="1"/>
           </p:cNvSpPr>
@@ -8576,604 +8698,11 @@
             <a:pPr>
               <a:defRPr/>
             </a:pPr>
-            <a:fld id="{8489DFE4-2133-EC7D-BFEB-7E7D4DD693C9}" type="slidenum">
+            <a:fld id="{08395586-F03A-48D1-94DF-16B239DF4FB5}" type="slidenum">
               <a:rPr lang="en-US"/>
-              <a:t/>
+              <a:t>‹#›</a:t>
             </a:fld>
             <a:endParaRPr lang="en-US"/>
-          </a:p>
-        </p:txBody>
-      </p:sp>
-      <p:sp>
-        <p:nvSpPr>
-          <p:cNvPr id="1330059326" name="Title 1"/>
-          <p:cNvSpPr>
-            <a:spLocks noGrp="1"/>
-          </p:cNvSpPr>
-          <p:nvPr>
-            <p:ph type="title"/>
-          </p:nvPr>
-        </p:nvSpPr>
-        <p:spPr bwMode="auto">
-          <a:xfrm flipH="0" flipV="0">
-            <a:off x="839786" y="457200"/>
-            <a:ext cx="10509962" cy="1600200"/>
-          </a:xfrm>
-        </p:spPr>
-        <p:txBody>
-          <a:bodyPr vertOverflow="overflow" horzOverflow="overflow" vert="horz" wrap="square" lIns="91440" tIns="45720" rIns="91440" bIns="45720" numCol="1" spcCol="0" rtlCol="0" fromWordArt="0" anchor="ctr" anchorCtr="0" forceAA="0" upright="0" compatLnSpc="0">
-            <a:normAutofit/>
-          </a:bodyPr>
-          <a:lstStyle>
-            <a:lvl1pPr algn="l">
-              <a:defRPr sz="4800"/>
-            </a:lvl1pPr>
-          </a:lstStyle>
-          <a:p>
-            <a:pPr>
-              <a:defRPr/>
-            </a:pPr>
-            <a:r>
-              <a:rPr lang="en-US"/>
-              <a:t>Click to edit Master title style</a:t>
-            </a:r>
-            <a:endParaRPr lang="en-US"/>
-          </a:p>
-        </p:txBody>
-      </p:sp>
-      <p:sp>
-        <p:nvSpPr>
-          <p:cNvPr id="1087783575" name="Text Placeholder 2"/>
-          <p:cNvSpPr>
-            <a:spLocks noGrp="1"/>
-          </p:cNvSpPr>
-          <p:nvPr>
-            <p:ph type="body" idx="1"/>
-          </p:nvPr>
-        </p:nvSpPr>
-        <p:spPr bwMode="auto">
-          <a:xfrm rot="0" flipH="0" flipV="0">
-            <a:off x="841248" y="2057400"/>
-            <a:ext cx="4823764" cy="3811586"/>
-          </a:xfrm>
-          <a:prstGeom prst="rect">
-            <a:avLst/>
-          </a:prstGeom>
-          <a:noFill/>
-        </p:spPr>
-        <p:txBody>
-          <a:bodyPr vertOverflow="overflow" horzOverflow="overflow" vert="horz" wrap="square" lIns="182880" tIns="91440" rIns="182880" bIns="91440" numCol="1" spcCol="0" rtlCol="0" fromWordArt="0" anchor="t" anchorCtr="0" forceAA="0" upright="0" compatLnSpc="0">
-            <a:normAutofit/>
-          </a:bodyPr>
-          <a:lstStyle>
-            <a:lvl1pPr>
-              <a:buFont typeface="Arial"/>
-              <a:buChar char="•"/>
-              <a:defRPr sz="2400">
-                <a:solidFill>
-                  <a:schemeClr val="tx1">
-                    <a:lumMod val="75000"/>
-                    <a:lumOff val="25000"/>
-                  </a:schemeClr>
-                </a:solidFill>
-              </a:defRPr>
-            </a:lvl1pPr>
-            <a:lvl2pPr>
-              <a:buFont typeface="Arial"/>
-              <a:buChar char="•"/>
-              <a:defRPr sz="2000">
-                <a:solidFill>
-                  <a:schemeClr val="tx1">
-                    <a:lumMod val="75000"/>
-                    <a:lumOff val="25000"/>
-                  </a:schemeClr>
-                </a:solidFill>
-              </a:defRPr>
-            </a:lvl2pPr>
-            <a:lvl3pPr>
-              <a:buFont typeface="Arial"/>
-              <a:buChar char="•"/>
-              <a:defRPr sz="1800" i="1">
-                <a:solidFill>
-                  <a:schemeClr val="tx1">
-                    <a:lumMod val="75000"/>
-                    <a:lumOff val="25000"/>
-                  </a:schemeClr>
-                </a:solidFill>
-              </a:defRPr>
-            </a:lvl3pPr>
-            <a:lvl4pPr>
-              <a:buFont typeface="Wingdings"/>
-              <a:buNone/>
-              <a:defRPr sz="1600" i="1">
-                <a:solidFill>
-                  <a:schemeClr val="tx1">
-                    <a:lumMod val="75000"/>
-                    <a:lumOff val="25000"/>
-                  </a:schemeClr>
-                </a:solidFill>
-              </a:defRPr>
-            </a:lvl4pPr>
-            <a:lvl5pPr>
-              <a:buFont typeface="Wingdings"/>
-              <a:buNone/>
-              <a:defRPr sz="1400" i="1">
-                <a:solidFill>
-                  <a:schemeClr val="tx1">
-                    <a:lumMod val="75000"/>
-                    <a:lumOff val="25000"/>
-                  </a:schemeClr>
-                </a:solidFill>
-              </a:defRPr>
-            </a:lvl5pPr>
-            <a:lvl6pPr>
-              <a:buNone/>
-              <a:defRPr/>
-            </a:lvl6pPr>
-            <a:lvl7pPr>
-              <a:buNone/>
-              <a:defRPr/>
-            </a:lvl7pPr>
-            <a:lvl8pPr>
-              <a:buNone/>
-              <a:defRPr/>
-            </a:lvl8pPr>
-            <a:lvl9pPr>
-              <a:buNone/>
-              <a:defRPr/>
-            </a:lvl9pPr>
-          </a:lstStyle>
-          <a:p>
-            <a:pPr>
-              <a:defRPr/>
-            </a:pPr>
-            <a:r>
-              <a:rPr lang="en-US" sz="2400" b="0" i="0" u="none" strike="noStrike" cap="none" spc="0">
-                <a:solidFill>
-                  <a:schemeClr val="tx1">
-                    <a:lumMod val="75000"/>
-                    <a:lumOff val="25000"/>
-                  </a:schemeClr>
-                </a:solidFill>
-              </a:rPr>
-              <a:t>Click to edit Master text styles</a:t>
-            </a:r>
-            <a:endParaRPr/>
-          </a:p>
-          <a:p>
-            <a:pPr lvl="1">
-              <a:defRPr/>
-            </a:pPr>
-            <a:r>
-              <a:rPr lang="en-US" sz="2000" b="0" i="0" u="none" strike="noStrike" cap="none" spc="0">
-                <a:solidFill>
-                  <a:schemeClr val="tx1">
-                    <a:lumMod val="75000"/>
-                    <a:lumOff val="25000"/>
-                  </a:schemeClr>
-                </a:solidFill>
-              </a:rPr>
-              <a:t>Second level</a:t>
-            </a:r>
-            <a:endParaRPr/>
-          </a:p>
-          <a:p>
-            <a:pPr lvl="2">
-              <a:defRPr/>
-            </a:pPr>
-            <a:r>
-              <a:rPr lang="en-US" sz="1800" b="0" i="1" u="none" strike="noStrike" cap="none" spc="0">
-                <a:solidFill>
-                  <a:schemeClr val="tx1">
-                    <a:lumMod val="75000"/>
-                    <a:lumOff val="25000"/>
-                  </a:schemeClr>
-                </a:solidFill>
-              </a:rPr>
-              <a:t>Third level</a:t>
-            </a:r>
-            <a:endParaRPr/>
-          </a:p>
-          <a:p>
-            <a:pPr lvl="2">
-              <a:defRPr/>
-            </a:pPr>
-            <a:endParaRPr/>
-          </a:p>
-          <a:p>
-            <a:pPr lvl="1">
-              <a:defRPr/>
-            </a:pPr>
-            <a:endParaRPr/>
-          </a:p>
-        </p:txBody>
-      </p:sp>
-      <p:sp>
-        <p:nvSpPr>
-          <p:cNvPr id="1884760123" name=""/>
-          <p:cNvSpPr/>
-          <p:nvPr/>
-        </p:nvSpPr>
-        <p:spPr bwMode="auto">
-          <a:xfrm rot="611918" flipH="0" flipV="0">
-            <a:off x="8957365" y="395327"/>
-            <a:ext cx="1329066" cy="315955"/>
-          </a:xfrm>
-          <a:custGeom>
-            <a:avLst/>
-            <a:gdLst/>
-            <a:ahLst/>
-            <a:cxnLst/>
-            <a:rect l="0" t="0" r="r" b="b"/>
-            <a:pathLst>
-              <a:path w="43200" h="43200" fill="norm" stroke="1" extrusionOk="0">
-                <a:moveTo>
-                  <a:pt x="0" y="34581"/>
-                </a:moveTo>
-                <a:cubicBezTo>
-                  <a:pt x="0" y="15610"/>
-                  <a:pt x="9750" y="0"/>
-                  <a:pt x="21599" y="0"/>
-                </a:cubicBezTo>
-                <a:cubicBezTo>
-                  <a:pt x="33449" y="0"/>
-                  <a:pt x="43199" y="15610"/>
-                  <a:pt x="43200" y="34581"/>
-                </a:cubicBezTo>
-                <a:cubicBezTo>
-                  <a:pt x="43200" y="53552"/>
-                  <a:pt x="37032" y="34954"/>
-                  <a:pt x="25182" y="34954"/>
-                </a:cubicBezTo>
-                <a:cubicBezTo>
-                  <a:pt x="13333" y="34954"/>
-                  <a:pt x="0" y="53552"/>
-                  <a:pt x="0" y="34581"/>
-                </a:cubicBezTo>
-                <a:close/>
-              </a:path>
-            </a:pathLst>
-          </a:custGeom>
-          <a:solidFill>
-            <a:schemeClr val="accent6">
-              <a:lumMod val="60000"/>
-              <a:lumOff val="40000"/>
-              <a:alpha val="60000"/>
-            </a:schemeClr>
-          </a:solidFill>
-          <a:ln w="12700" cap="flat" cmpd="sng" algn="ctr">
-            <a:noFill/>
-            <a:prstDash val="solid"/>
-            <a:miter lim="800000"/>
-          </a:ln>
-        </p:spPr>
-        <p:style>
-          <a:lnRef idx="2">
-            <a:schemeClr val="accent1">
-              <a:shade val="50000"/>
-            </a:schemeClr>
-          </a:lnRef>
-          <a:fillRef idx="1">
-            <a:schemeClr val="accent1"/>
-          </a:fillRef>
-          <a:effectRef idx="0">
-            <a:schemeClr val="accent1"/>
-          </a:effectRef>
-          <a:fontRef idx="minor">
-            <a:schemeClr val="lt1"/>
-          </a:fontRef>
-        </p:style>
-      </p:sp>
-      <p:sp>
-        <p:nvSpPr>
-          <p:cNvPr id="674142903" name=""/>
-          <p:cNvSpPr/>
-          <p:nvPr/>
-        </p:nvSpPr>
-        <p:spPr bwMode="auto">
-          <a:xfrm rot="611918" flipH="0" flipV="0">
-            <a:off x="9709720" y="88864"/>
-            <a:ext cx="906571" cy="215516"/>
-          </a:xfrm>
-          <a:custGeom>
-            <a:avLst/>
-            <a:gdLst/>
-            <a:ahLst/>
-            <a:cxnLst/>
-            <a:rect l="0" t="0" r="r" b="b"/>
-            <a:pathLst>
-              <a:path w="43200" h="43200" fill="norm" stroke="1" extrusionOk="0">
-                <a:moveTo>
-                  <a:pt x="0" y="34581"/>
-                </a:moveTo>
-                <a:cubicBezTo>
-                  <a:pt x="0" y="15610"/>
-                  <a:pt x="9750" y="0"/>
-                  <a:pt x="21599" y="0"/>
-                </a:cubicBezTo>
-                <a:cubicBezTo>
-                  <a:pt x="33449" y="0"/>
-                  <a:pt x="43199" y="15610"/>
-                  <a:pt x="43200" y="34581"/>
-                </a:cubicBezTo>
-                <a:cubicBezTo>
-                  <a:pt x="43200" y="53552"/>
-                  <a:pt x="37032" y="34954"/>
-                  <a:pt x="25182" y="34954"/>
-                </a:cubicBezTo>
-                <a:cubicBezTo>
-                  <a:pt x="13333" y="34954"/>
-                  <a:pt x="0" y="53552"/>
-                  <a:pt x="0" y="34581"/>
-                </a:cubicBezTo>
-                <a:close/>
-              </a:path>
-            </a:pathLst>
-          </a:custGeom>
-          <a:solidFill>
-            <a:schemeClr val="accent4">
-              <a:lumMod val="60000"/>
-              <a:lumOff val="40000"/>
-              <a:alpha val="70000"/>
-            </a:schemeClr>
-          </a:solidFill>
-          <a:ln w="12700" cap="flat" cmpd="sng" algn="ctr">
-            <a:noFill/>
-            <a:prstDash val="solid"/>
-            <a:miter lim="800000"/>
-          </a:ln>
-        </p:spPr>
-        <p:style>
-          <a:lnRef idx="2">
-            <a:schemeClr val="accent1">
-              <a:shade val="50000"/>
-            </a:schemeClr>
-          </a:lnRef>
-          <a:fillRef idx="1">
-            <a:schemeClr val="accent1"/>
-          </a:fillRef>
-          <a:effectRef idx="0">
-            <a:schemeClr val="accent1"/>
-          </a:effectRef>
-          <a:fontRef idx="minor">
-            <a:schemeClr val="lt1"/>
-          </a:fontRef>
-        </p:style>
-      </p:sp>
-      <p:sp>
-        <p:nvSpPr>
-          <p:cNvPr id="462706373" name=""/>
-          <p:cNvSpPr/>
-          <p:nvPr/>
-        </p:nvSpPr>
-        <p:spPr bwMode="auto">
-          <a:xfrm rot="1754041" flipH="0" flipV="0">
-            <a:off x="10579757" y="630585"/>
-            <a:ext cx="1019279" cy="223680"/>
-          </a:xfrm>
-          <a:custGeom>
-            <a:avLst/>
-            <a:gdLst/>
-            <a:ahLst/>
-            <a:cxnLst/>
-            <a:rect l="0" t="0" r="r" b="b"/>
-            <a:pathLst>
-              <a:path w="43200" h="43200" fill="norm" stroke="1" extrusionOk="0">
-                <a:moveTo>
-                  <a:pt x="0" y="34581"/>
-                </a:moveTo>
-                <a:cubicBezTo>
-                  <a:pt x="0" y="15610"/>
-                  <a:pt x="9750" y="0"/>
-                  <a:pt x="21599" y="0"/>
-                </a:cubicBezTo>
-                <a:cubicBezTo>
-                  <a:pt x="33449" y="0"/>
-                  <a:pt x="43199" y="15610"/>
-                  <a:pt x="43200" y="34581"/>
-                </a:cubicBezTo>
-                <a:cubicBezTo>
-                  <a:pt x="43200" y="53552"/>
-                  <a:pt x="37032" y="34954"/>
-                  <a:pt x="25182" y="34954"/>
-                </a:cubicBezTo>
-                <a:cubicBezTo>
-                  <a:pt x="13333" y="34954"/>
-                  <a:pt x="0" y="53552"/>
-                  <a:pt x="0" y="34581"/>
-                </a:cubicBezTo>
-                <a:close/>
-              </a:path>
-            </a:pathLst>
-          </a:custGeom>
-          <a:solidFill>
-            <a:schemeClr val="accent6">
-              <a:lumMod val="60000"/>
-              <a:lumOff val="40000"/>
-              <a:alpha val="99999"/>
-            </a:schemeClr>
-          </a:solidFill>
-          <a:ln w="12700" cap="flat" cmpd="sng" algn="ctr">
-            <a:noFill/>
-            <a:prstDash val="solid"/>
-            <a:miter lim="800000"/>
-          </a:ln>
-        </p:spPr>
-        <p:style>
-          <a:lnRef idx="2">
-            <a:schemeClr val="accent1">
-              <a:shade val="50000"/>
-            </a:schemeClr>
-          </a:lnRef>
-          <a:fillRef idx="1">
-            <a:schemeClr val="accent1"/>
-          </a:fillRef>
-          <a:effectRef idx="0">
-            <a:schemeClr val="accent1"/>
-          </a:effectRef>
-          <a:fontRef idx="minor">
-            <a:schemeClr val="lt1"/>
-          </a:fontRef>
-        </p:style>
-      </p:sp>
-      <p:sp>
-        <p:nvSpPr>
-          <p:cNvPr id="869019952" name=""/>
-          <p:cNvSpPr/>
-          <p:nvPr/>
-        </p:nvSpPr>
-        <p:spPr bwMode="auto">
-          <a:xfrm rot="1754041" flipH="0" flipV="0">
-            <a:off x="11133869" y="347756"/>
-            <a:ext cx="758565" cy="223680"/>
-          </a:xfrm>
-          <a:custGeom>
-            <a:avLst/>
-            <a:gdLst/>
-            <a:ahLst/>
-            <a:cxnLst/>
-            <a:rect l="0" t="0" r="r" b="b"/>
-            <a:pathLst>
-              <a:path w="43200" h="43200" fill="norm" stroke="1" extrusionOk="0">
-                <a:moveTo>
-                  <a:pt x="0" y="34581"/>
-                </a:moveTo>
-                <a:cubicBezTo>
-                  <a:pt x="0" y="15610"/>
-                  <a:pt x="9750" y="0"/>
-                  <a:pt x="21599" y="0"/>
-                </a:cubicBezTo>
-                <a:cubicBezTo>
-                  <a:pt x="33449" y="0"/>
-                  <a:pt x="43199" y="15610"/>
-                  <a:pt x="43200" y="34581"/>
-                </a:cubicBezTo>
-                <a:cubicBezTo>
-                  <a:pt x="43200" y="53552"/>
-                  <a:pt x="37032" y="34954"/>
-                  <a:pt x="25182" y="34954"/>
-                </a:cubicBezTo>
-                <a:cubicBezTo>
-                  <a:pt x="13333" y="34954"/>
-                  <a:pt x="0" y="53552"/>
-                  <a:pt x="0" y="34581"/>
-                </a:cubicBezTo>
-                <a:close/>
-              </a:path>
-            </a:pathLst>
-          </a:custGeom>
-          <a:solidFill>
-            <a:schemeClr val="accent4">
-              <a:lumMod val="60000"/>
-              <a:lumOff val="40000"/>
-              <a:alpha val="70000"/>
-            </a:schemeClr>
-          </a:solidFill>
-          <a:ln w="12700" cap="flat" cmpd="sng" algn="ctr">
-            <a:noFill/>
-            <a:prstDash val="solid"/>
-            <a:miter lim="800000"/>
-          </a:ln>
-        </p:spPr>
-        <p:style>
-          <a:lnRef idx="2">
-            <a:schemeClr val="accent1">
-              <a:shade val="50000"/>
-            </a:schemeClr>
-          </a:lnRef>
-          <a:fillRef idx="1">
-            <a:schemeClr val="accent1"/>
-          </a:fillRef>
-          <a:effectRef idx="0">
-            <a:schemeClr val="accent1"/>
-          </a:effectRef>
-          <a:fontRef idx="minor">
-            <a:schemeClr val="lt1"/>
-          </a:fontRef>
-        </p:style>
-      </p:sp>
-      <p:sp>
-        <p:nvSpPr>
-          <p:cNvPr id="1315983950" name=""/>
-          <p:cNvSpPr/>
-          <p:nvPr/>
-        </p:nvSpPr>
-        <p:spPr bwMode="auto">
-          <a:xfrm rot="1854869" flipH="0" flipV="1">
-            <a:off x="11381859" y="1542256"/>
-            <a:ext cx="562240" cy="264703"/>
-          </a:xfrm>
-          <a:custGeom>
-            <a:avLst/>
-            <a:gdLst/>
-            <a:ahLst/>
-            <a:cxnLst/>
-            <a:rect l="0" t="0" r="r" b="b"/>
-            <a:pathLst>
-              <a:path w="43200" h="43200" fill="norm" stroke="1" extrusionOk="0">
-                <a:moveTo>
-                  <a:pt x="0" y="20364"/>
-                </a:moveTo>
-                <a:cubicBezTo>
-                  <a:pt x="0" y="5844"/>
-                  <a:pt x="6454" y="8947"/>
-                  <a:pt x="19264" y="8947"/>
-                </a:cubicBezTo>
-                <a:cubicBezTo>
-                  <a:pt x="32074" y="8947"/>
-                  <a:pt x="43200" y="-8683"/>
-                  <a:pt x="43200" y="5830"/>
-                </a:cubicBezTo>
-                <a:cubicBezTo>
-                  <a:pt x="43200" y="20350"/>
-                  <a:pt x="29153" y="43200"/>
-                  <a:pt x="16344" y="43200"/>
-                </a:cubicBezTo>
-                <a:cubicBezTo>
-                  <a:pt x="3533" y="43200"/>
-                  <a:pt x="0" y="34884"/>
-                  <a:pt x="0" y="20364"/>
-                </a:cubicBezTo>
-                <a:close/>
-              </a:path>
-            </a:pathLst>
-          </a:custGeom>
-          <a:solidFill>
-            <a:schemeClr val="accent6">
-              <a:lumMod val="60000"/>
-              <a:lumOff val="40000"/>
-              <a:alpha val="70000"/>
-            </a:schemeClr>
-          </a:solidFill>
-          <a:ln w="12700" cap="flat" cmpd="sng" algn="ctr">
-            <a:noFill/>
-            <a:prstDash val="solid"/>
-            <a:miter lim="800000"/>
-          </a:ln>
-        </p:spPr>
-        <p:style>
-          <a:lnRef idx="2">
-            <a:schemeClr val="accent1">
-              <a:shade val="50000"/>
-            </a:schemeClr>
-          </a:lnRef>
-          <a:fillRef idx="1">
-            <a:schemeClr val="accent1"/>
-          </a:fillRef>
-          <a:effectRef idx="0">
-            <a:schemeClr val="accent1"/>
-          </a:effectRef>
-          <a:fontRef idx="minor">
-            <a:schemeClr val="lt1"/>
-          </a:fontRef>
-        </p:style>
-        <p:txBody>
-          <a:bodyPr/>
-          <a:p>
-            <a:pPr>
-              <a:defRPr/>
-            </a:pPr>
-            <a:endParaRPr/>
           </a:p>
         </p:txBody>
       </p:sp>
@@ -9597,6 +9126,7 @@
     <p:sldLayoutId id="2147483656" r:id="rId8"/>
     <p:sldLayoutId id="2147483657" r:id="rId9"/>
     <p:sldLayoutId id="2147483658" r:id="rId10"/>
+    <p:sldLayoutId id="2147483659" r:id="rId13"/>
   </p:sldLayoutIdLst>
   <p:txStyles>
     <p:titleStyle>
